--- a/data/employees/EMP046/AST-EMP046-01.pptx
+++ b/data/employees/EMP046/AST-EMP046-01.pptx
@@ -9,6 +9,7 @@
     <p:sldId id="257" r:id="rId8"/>
     <p:sldId id="258" r:id="rId9"/>
     <p:sldId id="259" r:id="rId10"/>
+    <p:sldId id="260" r:id="rId11"/>
   </p:sldIdLst>
   <p:sldSz cx="9144000" cy="6858000" type="screen4x3"/>
   <p:notesSz cx="6858000" cy="9144000"/>
@@ -3098,42 +3099,55 @@
             <a:spLocks noGrp="1"/>
           </p:cNvSpPr>
           <p:nvPr>
-            <p:ph type="ctrTitle"/>
-          </p:nvPr>
-        </p:nvSpPr>
-        <p:spPr/>
-        <p:txBody>
-          <a:bodyPr/>
-          <a:lstStyle/>
-          <a:p>
-            <a:r>
-              <a:t>Project update deck - EMP046</a:t>
-            </a:r>
-          </a:p>
-        </p:txBody>
-      </p:sp>
-      <p:sp>
-        <p:nvSpPr>
-          <p:cNvPr id="3" name="Subtitle 2"/>
-          <p:cNvSpPr>
-            <a:spLocks noGrp="1"/>
-          </p:cNvSpPr>
-          <p:nvPr>
-            <p:ph type="subTitle" idx="1"/>
-          </p:nvPr>
-        </p:nvSpPr>
-        <p:spPr/>
-        <p:txBody>
-          <a:bodyPr/>
-          <a:lstStyle/>
-          <a:p>
-            <a:r>
-              <a:t>Avery Wilson | Specialist | Operations</a:t>
-            </a:r>
-          </a:p>
-          <a:p>
-            <a:r>
-              <a:t>Prepared: 2025-02-17</a:t>
+            <p:ph type="title"/>
+          </p:nvPr>
+        </p:nvSpPr>
+        <p:spPr/>
+        <p:txBody>
+          <a:bodyPr/>
+          <a:lstStyle/>
+          <a:p>
+            <a:r>
+              <a:t>Ast Emp046 01 - EMP046</a:t>
+            </a:r>
+          </a:p>
+        </p:txBody>
+      </p:sp>
+      <p:sp>
+        <p:nvSpPr>
+          <p:cNvPr id="3" name="Content Placeholder 2"/>
+          <p:cNvSpPr>
+            <a:spLocks noGrp="1"/>
+          </p:cNvSpPr>
+          <p:nvPr>
+            <p:ph idx="1"/>
+          </p:nvPr>
+        </p:nvSpPr>
+        <p:spPr/>
+        <p:txBody>
+          <a:bodyPr/>
+          <a:lstStyle/>
+          <a:p>
+            <a:r>
+              <a:t>Slide 1: Executive Summary</a:t>
+            </a:r>
+          </a:p>
+          <a:p>
+            <a:pPr lvl="1"/>
+            <a:r>
+              <a:t>Section 1: Knowledge transfer and onboarding. EMP046 contributes to ast emp046 01 through recurring collaboration, clear ownership boundaries, and measurable outcomes. The team captures decisions, open issues, and handoffs so that knowledge remains discoverable for future programs.</a:t>
+            </a:r>
+          </a:p>
+          <a:p>
+            <a:pPr lvl="1"/>
+            <a:r>
+              <a:t>Section 2: Operational risk review. EMP046 contributes to ast emp046 01 through recurring collaboration, clear ownership boundaries, and measurable outcomes. The team captures decisions, open issues, and handoffs so that knowledge remains discoverable for future programs.</a:t>
+            </a:r>
+          </a:p>
+          <a:p>
+            <a:pPr lvl="1"/>
+            <a:r>
+              <a:t>Section 3: Quarterly delivery milestones. EMP046 contributes to ast emp046 01 through recurring collaboration, clear ownership boundaries, and measurable outcomes. The team captures decisions, open issues, and handoffs so that knowledge remains discoverable for future programs.</a:t>
             </a:r>
           </a:p>
         </p:txBody>
@@ -3172,7 +3186,7 @@
           <a:lstStyle/>
           <a:p>
             <a:r>
-              <a:t>Shift Productivity Dashboard</a:t>
+              <a:t>Ast Emp046 01 - EMP046</a:t>
             </a:r>
           </a:p>
         </p:txBody>
@@ -3193,17 +3207,25 @@
           <a:lstStyle/>
           <a:p>
             <a:r>
-              <a:t>Overview of Shift Productivity Dashboard for Operations department.</a:t>
-            </a:r>
-          </a:p>
-          <a:p>
-            <a:r>
-              <a:t>Responsible: Avery Wilson (Specialist)</a:t>
-            </a:r>
-          </a:p>
-          <a:p>
-            <a:r>
-              <a:t>Location: Bengaluru | Skills: Power BI, Ontology, MLOps, Fabric</a:t>
+              <a:t>Slide 2: Executive Summary</a:t>
+            </a:r>
+          </a:p>
+          <a:p>
+            <a:pPr lvl="1"/>
+            <a:r>
+              <a:t>Section 1: Quarterly delivery milestones. EMP046 contributes to ast emp046 01 through recurring collaboration, clear ownership boundaries, and measurable outcomes. The team captures decisions, open issues, and handoffs so that knowledge remains discoverable for future programs.</a:t>
+            </a:r>
+          </a:p>
+          <a:p>
+            <a:pPr lvl="1"/>
+            <a:r>
+              <a:t>Section 2: Operational risk review. EMP046 contributes to ast emp046 01 through recurring collaboration, clear ownership boundaries, and measurable outcomes. The team captures decisions, open issues, and handoffs so that knowledge remains discoverable for future programs.</a:t>
+            </a:r>
+          </a:p>
+          <a:p>
+            <a:pPr lvl="1"/>
+            <a:r>
+              <a:t>Section 3: Fabric semantic model planning. EMP046 contributes to ast emp046 01 through recurring collaboration, clear ownership boundaries, and measurable outcomes. The team captures decisions, open issues, and handoffs so that knowledge remains discoverable for future programs.</a:t>
             </a:r>
           </a:p>
         </p:txBody>
@@ -3242,7 +3264,7 @@
           <a:lstStyle/>
           <a:p>
             <a:r>
-              <a:t>Throughput vs. Target</a:t>
+              <a:t>Ast Emp046 01 - EMP046</a:t>
             </a:r>
           </a:p>
         </p:txBody>
@@ -3263,17 +3285,25 @@
           <a:lstStyle/>
           <a:p>
             <a:r>
-              <a:t>Overview of Throughput vs. Target for Operations department.</a:t>
-            </a:r>
-          </a:p>
-          <a:p>
-            <a:r>
-              <a:t>Responsible: Avery Wilson (Specialist)</a:t>
-            </a:r>
-          </a:p>
-          <a:p>
-            <a:r>
-              <a:t>Location: Bengaluru | Skills: Power BI, Ontology, MLOps, Fabric</a:t>
+              <a:t>Slide 3: Executive Summary</a:t>
+            </a:r>
+          </a:p>
+          <a:p>
+            <a:pPr lvl="1"/>
+            <a:r>
+              <a:t>Section 1: Operational risk review. EMP046 contributes to ast emp046 01 through recurring collaboration, clear ownership boundaries, and measurable outcomes. The team captures decisions, open issues, and handoffs so that knowledge remains discoverable for future programs.</a:t>
+            </a:r>
+          </a:p>
+          <a:p>
+            <a:pPr lvl="1"/>
+            <a:r>
+              <a:t>Section 2: Automation backlog refinement. EMP046 contributes to ast emp046 01 through recurring collaboration, clear ownership boundaries, and measurable outcomes. The team captures decisions, open issues, and handoffs so that knowledge remains discoverable for future programs.</a:t>
+            </a:r>
+          </a:p>
+          <a:p>
+            <a:pPr lvl="1"/>
+            <a:r>
+              <a:t>Section 3: Knowledge transfer and onboarding. EMP046 contributes to ast emp046 01 through recurring collaboration, clear ownership boundaries, and measurable outcomes. The team captures decisions, open issues, and handoffs so that knowledge remains discoverable for future programs.</a:t>
             </a:r>
           </a:p>
         </p:txBody>
@@ -3312,7 +3342,7 @@
           <a:lstStyle/>
           <a:p>
             <a:r>
-              <a:t>Incident Response Metrics</a:t>
+              <a:t>Ast Emp046 01 - EMP046</a:t>
             </a:r>
           </a:p>
         </p:txBody>
@@ -3333,17 +3363,103 @@
           <a:lstStyle/>
           <a:p>
             <a:r>
-              <a:t>Overview of Incident Response Metrics for Operations department.</a:t>
-            </a:r>
-          </a:p>
-          <a:p>
-            <a:r>
-              <a:t>Responsible: Avery Wilson (Specialist)</a:t>
-            </a:r>
-          </a:p>
-          <a:p>
-            <a:r>
-              <a:t>Location: Bengaluru | Skills: Power BI, Ontology, MLOps, Fabric</a:t>
+              <a:t>Slide 4: Executive Summary</a:t>
+            </a:r>
+          </a:p>
+          <a:p>
+            <a:pPr lvl="1"/>
+            <a:r>
+              <a:t>Section 1: Operational risk review. EMP046 contributes to ast emp046 01 through recurring collaboration, clear ownership boundaries, and measurable outcomes. The team captures decisions, open issues, and handoffs so that knowledge remains discoverable for future programs.</a:t>
+            </a:r>
+          </a:p>
+          <a:p>
+            <a:pPr lvl="1"/>
+            <a:r>
+              <a:t>Section 2: Quarterly delivery milestones. EMP046 contributes to ast emp046 01 through recurring collaboration, clear ownership boundaries, and measurable outcomes. The team captures decisions, open issues, and handoffs so that knowledge remains discoverable for future programs.</a:t>
+            </a:r>
+          </a:p>
+          <a:p>
+            <a:pPr lvl="1"/>
+            <a:r>
+              <a:t>Section 3: Department KPI performance. EMP046 contributes to ast emp046 01 through recurring collaboration, clear ownership boundaries, and measurable outcomes. The team captures decisions, open issues, and handoffs so that knowledge remains discoverable for future programs.</a:t>
+            </a:r>
+          </a:p>
+        </p:txBody>
+      </p:sp>
+    </p:spTree>
+  </p:cSld>
+  <p:clrMapOvr>
+    <a:masterClrMapping/>
+  </p:clrMapOvr>
+</p:sld>
+</file>
+
+<file path=ppt/slides/slide5.xml><?xml version="1.0" encoding="utf-8"?>
+<p:sld xmlns:a="http://schemas.openxmlformats.org/drawingml/2006/main" xmlns:p="http://schemas.openxmlformats.org/presentationml/2006/main" xmlns:r="http://schemas.openxmlformats.org/officeDocument/2006/relationships">
+  <p:cSld>
+    <p:spTree>
+      <p:nvGrpSpPr>
+        <p:cNvPr id="1" name=""/>
+        <p:cNvGrpSpPr/>
+        <p:nvPr/>
+      </p:nvGrpSpPr>
+      <p:grpSpPr/>
+      <p:sp>
+        <p:nvSpPr>
+          <p:cNvPr id="2" name="Title 1"/>
+          <p:cNvSpPr>
+            <a:spLocks noGrp="1"/>
+          </p:cNvSpPr>
+          <p:nvPr>
+            <p:ph type="title"/>
+          </p:nvPr>
+        </p:nvSpPr>
+        <p:spPr/>
+        <p:txBody>
+          <a:bodyPr/>
+          <a:lstStyle/>
+          <a:p>
+            <a:r>
+              <a:t>Ast Emp046 01 - EMP046</a:t>
+            </a:r>
+          </a:p>
+        </p:txBody>
+      </p:sp>
+      <p:sp>
+        <p:nvSpPr>
+          <p:cNvPr id="3" name="Content Placeholder 2"/>
+          <p:cNvSpPr>
+            <a:spLocks noGrp="1"/>
+          </p:cNvSpPr>
+          <p:nvPr>
+            <p:ph idx="1"/>
+          </p:nvPr>
+        </p:nvSpPr>
+        <p:spPr/>
+        <p:txBody>
+          <a:bodyPr/>
+          <a:lstStyle/>
+          <a:p>
+            <a:r>
+              <a:t>Slide 5: Executive Summary</a:t>
+            </a:r>
+          </a:p>
+          <a:p>
+            <a:pPr lvl="1"/>
+            <a:r>
+              <a:t>Section 1: Operational risk review. EMP046 contributes to ast emp046 01 through recurring collaboration, clear ownership boundaries, and measurable outcomes. The team captures decisions, open issues, and handoffs so that knowledge remains discoverable for future programs.</a:t>
+            </a:r>
+          </a:p>
+          <a:p>
+            <a:pPr lvl="1"/>
+            <a:r>
+              <a:t>Section 2: Customer escalation analysis. EMP046 contributes to ast emp046 01 through recurring collaboration, clear ownership boundaries, and measurable outcomes. The team captures decisions, open issues, and handoffs so that knowledge remains discoverable for future programs.</a:t>
+            </a:r>
+          </a:p>
+          <a:p>
+            <a:pPr lvl="1"/>
+            <a:r>
+              <a:t>Section 3: Knowledge transfer and onboarding. EMP046 contributes to ast emp046 01 through recurring collaboration, clear ownership boundaries, and measurable outcomes. The team captures decisions, open issues, and handoffs so that knowledge remains discoverable for future programs.</a:t>
             </a:r>
           </a:p>
         </p:txBody>
